--- a/Examples/GroupDocs.Assembly.Examples.Java/Data/Output/Presentation Reports/OtpToPptx.pptx
+++ b/Examples/GroupDocs.Assembly.Examples.Java/Data/Output/Presentation Reports/OtpToPptx.pptx
@@ -473,8 +473,8 @@
             </a:lvl1pPr>
           </a:lstStyle>
           <a:p>
-            <a:fld id="{AB0FDE17-BB01-4BFB-A17A-B55F8C8CA3FB}" type="datetimeFigureOut">
-              <a:t>25.09.2026</a:t>
+            <a:fld id="{26B24636-B9F1-4FD6-AA4E-F6C2C91E9F03}" type="datetimeFigureOut">
+              <a:t>27.09.2026</a:t>
             </a:fld>
           </a:p>
         </p:txBody>
@@ -623,7 +623,7 @@
             </a:lvl1pPr>
           </a:lstStyle>
           <a:p>
-            <a:fld id="{B71F8C92-CC36-4A0E-9E99-DFD127B48D91}" type="slidenum">
+            <a:fld id="{FCDC1D05-30C0-4949-961A-514901607B44}" type="slidenum">
               <a:rPr smtClean="0"/>
               <a:t>‹#›</a:t>
             </a:fld>
@@ -1050,7 +1050,7 @@
           <a:bodyPr lIns="91446" tIns="45723" rIns="91446" bIns="45723" anchor="ctr" anchorCtr="0"/>
           <a:lstStyle/>
           <a:p>
-            <a:fld id="{F7D2F8ED-5B3C-4EBF-BA22-BAD8086E158B}" type="datetimeFigureOut">
+            <a:fld id="{6609F697-014E-4E43-A6FE-1FAED3F43631}" type="datetimeFigureOut">
               <a:rPr lang="en-US" smtClean="0"/>
               <a:t>11/7/2009</a:t>
             </a:fld>
@@ -1242,7 +1242,7 @@
           <a:bodyPr lIns="91446" tIns="45723" rIns="91446" bIns="45723" anchor="ctr" anchorCtr="0"/>
           <a:lstStyle/>
           <a:p>
-            <a:fld id="{88A6248E-7DEA-419B-8DC7-2A3890A48F10}" type="datetimeFigureOut">
+            <a:fld id="{CE18B52B-C34B-40FC-838B-1C9561D79CB3}" type="datetimeFigureOut">
               <a:rPr lang="en-US" smtClean="0"/>
               <a:t>11/7/2009</a:t>
             </a:fld>
@@ -1434,7 +1434,7 @@
           <a:bodyPr lIns="91446" tIns="45723" rIns="91446" bIns="45723" anchor="ctr" anchorCtr="0"/>
           <a:lstStyle/>
           <a:p>
-            <a:fld id="{9D2026CE-7DC4-4C3D-A5FE-0FB9C8664AC3}" type="datetimeFigureOut">
+            <a:fld id="{EAB5A2B6-100E-47FB-B093-8AB0E433639C}" type="datetimeFigureOut">
               <a:rPr lang="en-US" smtClean="0"/>
               <a:t>11/7/2009</a:t>
             </a:fld>
@@ -1689,7 +1689,7 @@
           <a:bodyPr lIns="0" tIns="0" rIns="0" bIns="0" anchorCtr="0"/>
           <a:lstStyle/>
           <a:p>
-            <a:fld id="{F7D2F8ED-5B3C-4EBF-BA22-BAD8086E158B}" type="datetimeFigureOut">
+            <a:fld id="{6609F697-014E-4E43-A6FE-1FAED3F43631}" type="datetimeFigureOut">
               <a:rPr lang="en-US" smtClean="0"/>
               <a:t>11/7/2009</a:t>
             </a:fld>
@@ -1864,7 +1864,7 @@
           <a:bodyPr lIns="0" tIns="0" rIns="0" bIns="0" anchorCtr="0"/>
           <a:lstStyle/>
           <a:p>
-            <a:fld id="{0E3FB3B1-7896-4A2B-B564-7D33319CE43D}" type="datetimeFigureOut">
+            <a:fld id="{3E5E1A9E-A3DC-4DEC-974A-8BF7A3514A9F}" type="datetimeFigureOut">
               <a:rPr lang="en-US" smtClean="0"/>
               <a:t>11/7/2009</a:t>
             </a:fld>
@@ -2105,7 +2105,7 @@
           <a:bodyPr lIns="0" tIns="0" rIns="0" bIns="0" anchorCtr="0"/>
           <a:lstStyle/>
           <a:p>
-            <a:fld id="{1E5720F2-758D-4618-8346-289B7FED303B}" type="datetimeFigureOut">
+            <a:fld id="{83A32B65-8F9F-41D2-B956-7D56ED39315C}" type="datetimeFigureOut">
               <a:rPr lang="en-US" smtClean="0"/>
               <a:t>11/7/2009</a:t>
             </a:fld>
@@ -2387,7 +2387,7 @@
           <a:bodyPr lIns="0" tIns="0" rIns="0" bIns="0" anchorCtr="0"/>
           <a:lstStyle/>
           <a:p>
-            <a:fld id="{89FA8575-FE54-4F44-A710-7D807DBB827C}" type="datetimeFigureOut">
+            <a:fld id="{52A3A8CE-AD0E-4FE9-860A-315AE10316F9}" type="datetimeFigureOut">
               <a:rPr lang="en-US" smtClean="0"/>
               <a:t>11/7/2009</a:t>
             </a:fld>
@@ -2787,7 +2787,7 @@
           <a:bodyPr lIns="0" tIns="0" rIns="0" bIns="0" anchorCtr="0"/>
           <a:lstStyle/>
           <a:p>
-            <a:fld id="{E5E0C075-D139-4ACB-A200-587B4FA34F04}" type="datetimeFigureOut">
+            <a:fld id="{CA8D4E56-0AAE-4170-A443-D45410E43A6F}" type="datetimeFigureOut">
               <a:rPr lang="en-US" smtClean="0"/>
               <a:t>11/7/2009</a:t>
             </a:fld>
@@ -2911,7 +2911,7 @@
           <a:bodyPr lIns="0" tIns="0" rIns="0" bIns="0" anchorCtr="0"/>
           <a:lstStyle/>
           <a:p>
-            <a:fld id="{254794A9-C415-4F2F-AD32-816D3A9369FA}" type="datetimeFigureOut">
+            <a:fld id="{DEAAB9E3-3FE3-4EF0-B693-198B39342392}" type="datetimeFigureOut">
               <a:rPr lang="en-US" smtClean="0"/>
               <a:t>11/7/2009</a:t>
             </a:fld>
@@ -3012,7 +3012,7 @@
           <a:bodyPr lIns="0" tIns="0" rIns="0" bIns="0" anchorCtr="0"/>
           <a:lstStyle/>
           <a:p>
-            <a:fld id="{0F9F988A-1225-47DD-ABE0-1E6B8B54C99E}" type="datetimeFigureOut">
+            <a:fld id="{23A0E488-8E4C-4DB4-B6C1-8EB4A0062952}" type="datetimeFigureOut">
               <a:rPr lang="en-US" smtClean="0"/>
               <a:t>11/7/2009</a:t>
             </a:fld>
@@ -3278,7 +3278,7 @@
           <a:bodyPr lIns="0" tIns="0" rIns="0" bIns="0" anchorCtr="0"/>
           <a:lstStyle/>
           <a:p>
-            <a:fld id="{A0E518AD-BB0B-44DD-BB08-7715188AC000}" type="datetimeFigureOut">
+            <a:fld id="{9FA4FED4-A108-4919-AAC5-D27BA2845DB0}" type="datetimeFigureOut">
               <a:rPr lang="en-US" smtClean="0"/>
               <a:t>11/7/2009</a:t>
             </a:fld>
@@ -3453,7 +3453,7 @@
           <a:bodyPr lIns="91446" tIns="45723" rIns="91446" bIns="45723" anchor="ctr" anchorCtr="0"/>
           <a:lstStyle/>
           <a:p>
-            <a:fld id="{0E3FB3B1-7896-4A2B-B564-7D33319CE43D}" type="datetimeFigureOut">
+            <a:fld id="{3E5E1A9E-A3DC-4DEC-974A-8BF7A3514A9F}" type="datetimeFigureOut">
               <a:rPr lang="en-US" smtClean="0"/>
               <a:t>11/7/2009</a:t>
             </a:fld>
@@ -3713,7 +3713,7 @@
           <a:bodyPr lIns="0" tIns="0" rIns="0" bIns="0" anchorCtr="0"/>
           <a:lstStyle/>
           <a:p>
-            <a:fld id="{653B7A32-C3B2-4D92-86E2-0A800CA6F7B0}" type="datetimeFigureOut">
+            <a:fld id="{8F3F8DBE-0595-429F-8BC7-4178403BBE93}" type="datetimeFigureOut">
               <a:rPr lang="en-US" smtClean="0"/>
               <a:t>11/7/2009</a:t>
             </a:fld>
@@ -3888,7 +3888,7 @@
           <a:bodyPr lIns="0" tIns="0" rIns="0" bIns="0" anchorCtr="0"/>
           <a:lstStyle/>
           <a:p>
-            <a:fld id="{88A6248E-7DEA-419B-8DC7-2A3890A48F10}" type="datetimeFigureOut">
+            <a:fld id="{CE18B52B-C34B-40FC-838B-1C9561D79CB3}" type="datetimeFigureOut">
               <a:rPr lang="en-US" smtClean="0"/>
               <a:t>11/7/2009</a:t>
             </a:fld>
@@ -4063,7 +4063,7 @@
           <a:bodyPr lIns="0" tIns="0" rIns="0" bIns="0" anchorCtr="0"/>
           <a:lstStyle/>
           <a:p>
-            <a:fld id="{9D2026CE-7DC4-4C3D-A5FE-0FB9C8664AC3}" type="datetimeFigureOut">
+            <a:fld id="{EAB5A2B6-100E-47FB-B093-8AB0E433639C}" type="datetimeFigureOut">
               <a:rPr lang="en-US" smtClean="0"/>
               <a:t>11/7/2009</a:t>
             </a:fld>
@@ -4301,7 +4301,7 @@
           <a:bodyPr lIns="0" tIns="0" rIns="0" bIns="0" anchorCtr="0"/>
           <a:lstStyle/>
           <a:p>
-            <a:fld id="{F7D2F8ED-5B3C-4EBF-BA22-BAD8086E158B}" type="datetimeFigureOut">
+            <a:fld id="{6609F697-014E-4E43-A6FE-1FAED3F43631}" type="datetimeFigureOut">
               <a:rPr lang="en-US" smtClean="0"/>
               <a:t>11/7/2009</a:t>
             </a:fld>
@@ -4476,7 +4476,7 @@
           <a:bodyPr lIns="0" tIns="0" rIns="0" bIns="0" anchorCtr="0"/>
           <a:lstStyle/>
           <a:p>
-            <a:fld id="{0E3FB3B1-7896-4A2B-B564-7D33319CE43D}" type="datetimeFigureOut">
+            <a:fld id="{3E5E1A9E-A3DC-4DEC-974A-8BF7A3514A9F}" type="datetimeFigureOut">
               <a:rPr lang="en-US" smtClean="0"/>
               <a:t>11/7/2009</a:t>
             </a:fld>
@@ -4717,7 +4717,7 @@
           <a:bodyPr lIns="0" tIns="0" rIns="0" bIns="0" anchorCtr="0"/>
           <a:lstStyle/>
           <a:p>
-            <a:fld id="{1E5720F2-758D-4618-8346-289B7FED303B}" type="datetimeFigureOut">
+            <a:fld id="{83A32B65-8F9F-41D2-B956-7D56ED39315C}" type="datetimeFigureOut">
               <a:rPr lang="en-US" smtClean="0"/>
               <a:t>11/7/2009</a:t>
             </a:fld>
@@ -4999,7 +4999,7 @@
           <a:bodyPr lIns="0" tIns="0" rIns="0" bIns="0" anchorCtr="0"/>
           <a:lstStyle/>
           <a:p>
-            <a:fld id="{89FA8575-FE54-4F44-A710-7D807DBB827C}" type="datetimeFigureOut">
+            <a:fld id="{52A3A8CE-AD0E-4FE9-860A-315AE10316F9}" type="datetimeFigureOut">
               <a:rPr lang="en-US" smtClean="0"/>
               <a:t>11/7/2009</a:t>
             </a:fld>
@@ -5399,7 +5399,7 @@
           <a:bodyPr lIns="0" tIns="0" rIns="0" bIns="0" anchorCtr="0"/>
           <a:lstStyle/>
           <a:p>
-            <a:fld id="{E5E0C075-D139-4ACB-A200-587B4FA34F04}" type="datetimeFigureOut">
+            <a:fld id="{CA8D4E56-0AAE-4170-A443-D45410E43A6F}" type="datetimeFigureOut">
               <a:rPr lang="en-US" smtClean="0"/>
               <a:t>11/7/2009</a:t>
             </a:fld>
@@ -5523,7 +5523,7 @@
           <a:bodyPr lIns="0" tIns="0" rIns="0" bIns="0" anchorCtr="0"/>
           <a:lstStyle/>
           <a:p>
-            <a:fld id="{254794A9-C415-4F2F-AD32-816D3A9369FA}" type="datetimeFigureOut">
+            <a:fld id="{DEAAB9E3-3FE3-4EF0-B693-198B39342392}" type="datetimeFigureOut">
               <a:rPr lang="en-US" smtClean="0"/>
               <a:t>11/7/2009</a:t>
             </a:fld>
@@ -5624,7 +5624,7 @@
           <a:bodyPr lIns="0" tIns="0" rIns="0" bIns="0" anchorCtr="0"/>
           <a:lstStyle/>
           <a:p>
-            <a:fld id="{0F9F988A-1225-47DD-ABE0-1E6B8B54C99E}" type="datetimeFigureOut">
+            <a:fld id="{23A0E488-8E4C-4DB4-B6C1-8EB4A0062952}" type="datetimeFigureOut">
               <a:rPr lang="en-US" smtClean="0"/>
               <a:t>11/7/2009</a:t>
             </a:fld>
@@ -5865,7 +5865,7 @@
           <a:bodyPr lIns="91446" tIns="45723" rIns="91446" bIns="45723" anchor="ctr" anchorCtr="0"/>
           <a:lstStyle/>
           <a:p>
-            <a:fld id="{1E5720F2-758D-4618-8346-289B7FED303B}" type="datetimeFigureOut">
+            <a:fld id="{83A32B65-8F9F-41D2-B956-7D56ED39315C}" type="datetimeFigureOut">
               <a:rPr lang="en-US" smtClean="0"/>
               <a:t>11/7/2009</a:t>
             </a:fld>
@@ -6148,7 +6148,7 @@
           <a:bodyPr lIns="0" tIns="0" rIns="0" bIns="0" anchorCtr="0"/>
           <a:lstStyle/>
           <a:p>
-            <a:fld id="{A0E518AD-BB0B-44DD-BB08-7715188AC000}" type="datetimeFigureOut">
+            <a:fld id="{9FA4FED4-A108-4919-AAC5-D27BA2845DB0}" type="datetimeFigureOut">
               <a:rPr lang="en-US" smtClean="0"/>
               <a:t>11/7/2009</a:t>
             </a:fld>
@@ -6391,7 +6391,7 @@
           <a:bodyPr lIns="0" tIns="0" rIns="0" bIns="0" anchorCtr="0"/>
           <a:lstStyle/>
           <a:p>
-            <a:fld id="{653B7A32-C3B2-4D92-86E2-0A800CA6F7B0}" type="datetimeFigureOut">
+            <a:fld id="{8F3F8DBE-0595-429F-8BC7-4178403BBE93}" type="datetimeFigureOut">
               <a:rPr lang="en-US" smtClean="0"/>
               <a:t>11/7/2009</a:t>
             </a:fld>
@@ -6566,7 +6566,7 @@
           <a:bodyPr lIns="0" tIns="0" rIns="0" bIns="0" anchorCtr="0"/>
           <a:lstStyle/>
           <a:p>
-            <a:fld id="{88A6248E-7DEA-419B-8DC7-2A3890A48F10}" type="datetimeFigureOut">
+            <a:fld id="{CE18B52B-C34B-40FC-838B-1C9561D79CB3}" type="datetimeFigureOut">
               <a:rPr lang="en-US" smtClean="0"/>
               <a:t>11/7/2009</a:t>
             </a:fld>
@@ -6741,7 +6741,7 @@
           <a:bodyPr lIns="0" tIns="0" rIns="0" bIns="0" anchorCtr="0"/>
           <a:lstStyle/>
           <a:p>
-            <a:fld id="{9D2026CE-7DC4-4C3D-A5FE-0FB9C8664AC3}" type="datetimeFigureOut">
+            <a:fld id="{EAB5A2B6-100E-47FB-B093-8AB0E433639C}" type="datetimeFigureOut">
               <a:rPr lang="en-US" smtClean="0"/>
               <a:t>11/7/2009</a:t>
             </a:fld>
@@ -7023,7 +7023,7 @@
           <a:bodyPr lIns="91446" tIns="45723" rIns="91446" bIns="45723" anchor="ctr" anchorCtr="0"/>
           <a:lstStyle/>
           <a:p>
-            <a:fld id="{89FA8575-FE54-4F44-A710-7D807DBB827C}" type="datetimeFigureOut">
+            <a:fld id="{52A3A8CE-AD0E-4FE9-860A-315AE10316F9}" type="datetimeFigureOut">
               <a:rPr lang="en-US" smtClean="0"/>
               <a:t>11/7/2009</a:t>
             </a:fld>
@@ -7440,7 +7440,7 @@
           <a:bodyPr lIns="91446" tIns="45723" rIns="91446" bIns="45723" anchor="ctr" anchorCtr="0"/>
           <a:lstStyle/>
           <a:p>
-            <a:fld id="{E5E0C075-D139-4ACB-A200-587B4FA34F04}" type="datetimeFigureOut">
+            <a:fld id="{CA8D4E56-0AAE-4170-A443-D45410E43A6F}" type="datetimeFigureOut">
               <a:rPr lang="en-US" smtClean="0"/>
               <a:t>11/7/2009</a:t>
             </a:fld>
@@ -7581,7 +7581,7 @@
           <a:bodyPr lIns="91446" tIns="45723" rIns="91446" bIns="45723" anchor="ctr" anchorCtr="0"/>
           <a:lstStyle/>
           <a:p>
-            <a:fld id="{254794A9-C415-4F2F-AD32-816D3A9369FA}" type="datetimeFigureOut">
+            <a:fld id="{DEAAB9E3-3FE3-4EF0-B693-198B39342392}" type="datetimeFigureOut">
               <a:rPr lang="en-US" smtClean="0"/>
               <a:t>11/7/2009</a:t>
             </a:fld>
@@ -7699,7 +7699,7 @@
           <a:bodyPr lIns="91446" tIns="45723" rIns="91446" bIns="45723" anchor="ctr" anchorCtr="0"/>
           <a:lstStyle/>
           <a:p>
-            <a:fld id="{0F9F988A-1225-47DD-ABE0-1E6B8B54C99E}" type="datetimeFigureOut">
+            <a:fld id="{23A0E488-8E4C-4DB4-B6C1-8EB4A0062952}" type="datetimeFigureOut">
               <a:rPr lang="en-US" smtClean="0"/>
               <a:t>11/7/2009</a:t>
             </a:fld>
@@ -7982,7 +7982,7 @@
           <a:bodyPr lIns="91446" tIns="45723" rIns="91446" bIns="45723" anchor="ctr" anchorCtr="0"/>
           <a:lstStyle/>
           <a:p>
-            <a:fld id="{A0E518AD-BB0B-44DD-BB08-7715188AC000}" type="datetimeFigureOut">
+            <a:fld id="{9FA4FED4-A108-4919-AAC5-D27BA2845DB0}" type="datetimeFigureOut">
               <a:rPr lang="en-US" smtClean="0"/>
               <a:t>11/7/2009</a:t>
             </a:fld>
@@ -8242,7 +8242,7 @@
           <a:bodyPr lIns="91446" tIns="45723" rIns="91446" bIns="45723" anchor="ctr" anchorCtr="0"/>
           <a:lstStyle/>
           <a:p>
-            <a:fld id="{653B7A32-C3B2-4D92-86E2-0A800CA6F7B0}" type="datetimeFigureOut">
+            <a:fld id="{8F3F8DBE-0595-429F-8BC7-4178403BBE93}" type="datetimeFigureOut">
               <a:rPr lang="en-US" smtClean="0"/>
               <a:t>11/7/2009</a:t>
             </a:fld>

--- a/Examples/GroupDocs.Assembly.Examples.Java/Data/Output/Presentation Reports/OtpToPptx.pptx
+++ b/Examples/GroupDocs.Assembly.Examples.Java/Data/Output/Presentation Reports/OtpToPptx.pptx
@@ -473,8 +473,8 @@
             </a:lvl1pPr>
           </a:lstStyle>
           <a:p>
-            <a:fld id="{26B24636-B9F1-4FD6-AA4E-F6C2C91E9F03}" type="datetimeFigureOut">
-              <a:t>27.09.2026</a:t>
+            <a:fld id="{E975F71A-9D09-405B-BEA6-3FB174C8DA43}" type="datetimeFigureOut">
+              <a:t>13.10.2026</a:t>
             </a:fld>
           </a:p>
         </p:txBody>
@@ -623,7 +623,7 @@
             </a:lvl1pPr>
           </a:lstStyle>
           <a:p>
-            <a:fld id="{FCDC1D05-30C0-4949-961A-514901607B44}" type="slidenum">
+            <a:fld id="{17B82CC4-B128-4479-B9FB-D88D45DE4F61}" type="slidenum">
               <a:rPr smtClean="0"/>
               <a:t>‹#›</a:t>
             </a:fld>
@@ -1050,7 +1050,7 @@
           <a:bodyPr lIns="91446" tIns="45723" rIns="91446" bIns="45723" anchor="ctr" anchorCtr="0"/>
           <a:lstStyle/>
           <a:p>
-            <a:fld id="{6609F697-014E-4E43-A6FE-1FAED3F43631}" type="datetimeFigureOut">
+            <a:fld id="{32ED64B5-8A78-4DDD-9625-879C8E037CF4}" type="datetimeFigureOut">
               <a:rPr lang="en-US" smtClean="0"/>
               <a:t>11/7/2009</a:t>
             </a:fld>
@@ -1242,7 +1242,7 @@
           <a:bodyPr lIns="91446" tIns="45723" rIns="91446" bIns="45723" anchor="ctr" anchorCtr="0"/>
           <a:lstStyle/>
           <a:p>
-            <a:fld id="{CE18B52B-C34B-40FC-838B-1C9561D79CB3}" type="datetimeFigureOut">
+            <a:fld id="{44903253-3838-4CC8-9CE4-E23A99DE7358}" type="datetimeFigureOut">
               <a:rPr lang="en-US" smtClean="0"/>
               <a:t>11/7/2009</a:t>
             </a:fld>
@@ -1434,7 +1434,7 @@
           <a:bodyPr lIns="91446" tIns="45723" rIns="91446" bIns="45723" anchor="ctr" anchorCtr="0"/>
           <a:lstStyle/>
           <a:p>
-            <a:fld id="{EAB5A2B6-100E-47FB-B093-8AB0E433639C}" type="datetimeFigureOut">
+            <a:fld id="{FF990493-DC5F-4695-9694-04BF9B416906}" type="datetimeFigureOut">
               <a:rPr lang="en-US" smtClean="0"/>
               <a:t>11/7/2009</a:t>
             </a:fld>
@@ -1689,7 +1689,7 @@
           <a:bodyPr lIns="0" tIns="0" rIns="0" bIns="0" anchorCtr="0"/>
           <a:lstStyle/>
           <a:p>
-            <a:fld id="{6609F697-014E-4E43-A6FE-1FAED3F43631}" type="datetimeFigureOut">
+            <a:fld id="{32ED64B5-8A78-4DDD-9625-879C8E037CF4}" type="datetimeFigureOut">
               <a:rPr lang="en-US" smtClean="0"/>
               <a:t>11/7/2009</a:t>
             </a:fld>
@@ -1864,7 +1864,7 @@
           <a:bodyPr lIns="0" tIns="0" rIns="0" bIns="0" anchorCtr="0"/>
           <a:lstStyle/>
           <a:p>
-            <a:fld id="{3E5E1A9E-A3DC-4DEC-974A-8BF7A3514A9F}" type="datetimeFigureOut">
+            <a:fld id="{CD351D3F-FA01-469F-8EA6-4F1F181B14D3}" type="datetimeFigureOut">
               <a:rPr lang="en-US" smtClean="0"/>
               <a:t>11/7/2009</a:t>
             </a:fld>
@@ -2105,7 +2105,7 @@
           <a:bodyPr lIns="0" tIns="0" rIns="0" bIns="0" anchorCtr="0"/>
           <a:lstStyle/>
           <a:p>
-            <a:fld id="{83A32B65-8F9F-41D2-B956-7D56ED39315C}" type="datetimeFigureOut">
+            <a:fld id="{C322A7A8-CE5C-4AA8-9527-61D3102DCFBB}" type="datetimeFigureOut">
               <a:rPr lang="en-US" smtClean="0"/>
               <a:t>11/7/2009</a:t>
             </a:fld>
@@ -2387,7 +2387,7 @@
           <a:bodyPr lIns="0" tIns="0" rIns="0" bIns="0" anchorCtr="0"/>
           <a:lstStyle/>
           <a:p>
-            <a:fld id="{52A3A8CE-AD0E-4FE9-860A-315AE10316F9}" type="datetimeFigureOut">
+            <a:fld id="{135F3AD7-F0B8-4C42-8479-9149A9353E55}" type="datetimeFigureOut">
               <a:rPr lang="en-US" smtClean="0"/>
               <a:t>11/7/2009</a:t>
             </a:fld>
@@ -2787,7 +2787,7 @@
           <a:bodyPr lIns="0" tIns="0" rIns="0" bIns="0" anchorCtr="0"/>
           <a:lstStyle/>
           <a:p>
-            <a:fld id="{CA8D4E56-0AAE-4170-A443-D45410E43A6F}" type="datetimeFigureOut">
+            <a:fld id="{0818A7C3-5EC3-4107-8E49-99FD42015576}" type="datetimeFigureOut">
               <a:rPr lang="en-US" smtClean="0"/>
               <a:t>11/7/2009</a:t>
             </a:fld>
@@ -2911,7 +2911,7 @@
           <a:bodyPr lIns="0" tIns="0" rIns="0" bIns="0" anchorCtr="0"/>
           <a:lstStyle/>
           <a:p>
-            <a:fld id="{DEAAB9E3-3FE3-4EF0-B693-198B39342392}" type="datetimeFigureOut">
+            <a:fld id="{E45857B8-471B-45D1-BCD5-196F756E552C}" type="datetimeFigureOut">
               <a:rPr lang="en-US" smtClean="0"/>
               <a:t>11/7/2009</a:t>
             </a:fld>
@@ -3012,7 +3012,7 @@
           <a:bodyPr lIns="0" tIns="0" rIns="0" bIns="0" anchorCtr="0"/>
           <a:lstStyle/>
           <a:p>
-            <a:fld id="{23A0E488-8E4C-4DB4-B6C1-8EB4A0062952}" type="datetimeFigureOut">
+            <a:fld id="{7D5F39F5-4970-4E35-AED5-B2422B918EBC}" type="datetimeFigureOut">
               <a:rPr lang="en-US" smtClean="0"/>
               <a:t>11/7/2009</a:t>
             </a:fld>
@@ -3278,7 +3278,7 @@
           <a:bodyPr lIns="0" tIns="0" rIns="0" bIns="0" anchorCtr="0"/>
           <a:lstStyle/>
           <a:p>
-            <a:fld id="{9FA4FED4-A108-4919-AAC5-D27BA2845DB0}" type="datetimeFigureOut">
+            <a:fld id="{2605C728-C5D3-482A-B092-48960685126E}" type="datetimeFigureOut">
               <a:rPr lang="en-US" smtClean="0"/>
               <a:t>11/7/2009</a:t>
             </a:fld>
@@ -3453,7 +3453,7 @@
           <a:bodyPr lIns="91446" tIns="45723" rIns="91446" bIns="45723" anchor="ctr" anchorCtr="0"/>
           <a:lstStyle/>
           <a:p>
-            <a:fld id="{3E5E1A9E-A3DC-4DEC-974A-8BF7A3514A9F}" type="datetimeFigureOut">
+            <a:fld id="{CD351D3F-FA01-469F-8EA6-4F1F181B14D3}" type="datetimeFigureOut">
               <a:rPr lang="en-US" smtClean="0"/>
               <a:t>11/7/2009</a:t>
             </a:fld>
@@ -3713,7 +3713,7 @@
           <a:bodyPr lIns="0" tIns="0" rIns="0" bIns="0" anchorCtr="0"/>
           <a:lstStyle/>
           <a:p>
-            <a:fld id="{8F3F8DBE-0595-429F-8BC7-4178403BBE93}" type="datetimeFigureOut">
+            <a:fld id="{8B75E2A3-7FAD-47A9-981F-E6F09D04F338}" type="datetimeFigureOut">
               <a:rPr lang="en-US" smtClean="0"/>
               <a:t>11/7/2009</a:t>
             </a:fld>
@@ -3888,7 +3888,7 @@
           <a:bodyPr lIns="0" tIns="0" rIns="0" bIns="0" anchorCtr="0"/>
           <a:lstStyle/>
           <a:p>
-            <a:fld id="{CE18B52B-C34B-40FC-838B-1C9561D79CB3}" type="datetimeFigureOut">
+            <a:fld id="{44903253-3838-4CC8-9CE4-E23A99DE7358}" type="datetimeFigureOut">
               <a:rPr lang="en-US" smtClean="0"/>
               <a:t>11/7/2009</a:t>
             </a:fld>
@@ -4063,7 +4063,7 @@
           <a:bodyPr lIns="0" tIns="0" rIns="0" bIns="0" anchorCtr="0"/>
           <a:lstStyle/>
           <a:p>
-            <a:fld id="{EAB5A2B6-100E-47FB-B093-8AB0E433639C}" type="datetimeFigureOut">
+            <a:fld id="{FF990493-DC5F-4695-9694-04BF9B416906}" type="datetimeFigureOut">
               <a:rPr lang="en-US" smtClean="0"/>
               <a:t>11/7/2009</a:t>
             </a:fld>
@@ -4301,7 +4301,7 @@
           <a:bodyPr lIns="0" tIns="0" rIns="0" bIns="0" anchorCtr="0"/>
           <a:lstStyle/>
           <a:p>
-            <a:fld id="{6609F697-014E-4E43-A6FE-1FAED3F43631}" type="datetimeFigureOut">
+            <a:fld id="{32ED64B5-8A78-4DDD-9625-879C8E037CF4}" type="datetimeFigureOut">
               <a:rPr lang="en-US" smtClean="0"/>
               <a:t>11/7/2009</a:t>
             </a:fld>
@@ -4476,7 +4476,7 @@
           <a:bodyPr lIns="0" tIns="0" rIns="0" bIns="0" anchorCtr="0"/>
           <a:lstStyle/>
           <a:p>
-            <a:fld id="{3E5E1A9E-A3DC-4DEC-974A-8BF7A3514A9F}" type="datetimeFigureOut">
+            <a:fld id="{CD351D3F-FA01-469F-8EA6-4F1F181B14D3}" type="datetimeFigureOut">
               <a:rPr lang="en-US" smtClean="0"/>
               <a:t>11/7/2009</a:t>
             </a:fld>
@@ -4717,7 +4717,7 @@
           <a:bodyPr lIns="0" tIns="0" rIns="0" bIns="0" anchorCtr="0"/>
           <a:lstStyle/>
           <a:p>
-            <a:fld id="{83A32B65-8F9F-41D2-B956-7D56ED39315C}" type="datetimeFigureOut">
+            <a:fld id="{C322A7A8-CE5C-4AA8-9527-61D3102DCFBB}" type="datetimeFigureOut">
               <a:rPr lang="en-US" smtClean="0"/>
               <a:t>11/7/2009</a:t>
             </a:fld>
@@ -4999,7 +4999,7 @@
           <a:bodyPr lIns="0" tIns="0" rIns="0" bIns="0" anchorCtr="0"/>
           <a:lstStyle/>
           <a:p>
-            <a:fld id="{52A3A8CE-AD0E-4FE9-860A-315AE10316F9}" type="datetimeFigureOut">
+            <a:fld id="{135F3AD7-F0B8-4C42-8479-9149A9353E55}" type="datetimeFigureOut">
               <a:rPr lang="en-US" smtClean="0"/>
               <a:t>11/7/2009</a:t>
             </a:fld>
@@ -5399,7 +5399,7 @@
           <a:bodyPr lIns="0" tIns="0" rIns="0" bIns="0" anchorCtr="0"/>
           <a:lstStyle/>
           <a:p>
-            <a:fld id="{CA8D4E56-0AAE-4170-A443-D45410E43A6F}" type="datetimeFigureOut">
+            <a:fld id="{0818A7C3-5EC3-4107-8E49-99FD42015576}" type="datetimeFigureOut">
               <a:rPr lang="en-US" smtClean="0"/>
               <a:t>11/7/2009</a:t>
             </a:fld>
@@ -5523,7 +5523,7 @@
           <a:bodyPr lIns="0" tIns="0" rIns="0" bIns="0" anchorCtr="0"/>
           <a:lstStyle/>
           <a:p>
-            <a:fld id="{DEAAB9E3-3FE3-4EF0-B693-198B39342392}" type="datetimeFigureOut">
+            <a:fld id="{E45857B8-471B-45D1-BCD5-196F756E552C}" type="datetimeFigureOut">
               <a:rPr lang="en-US" smtClean="0"/>
               <a:t>11/7/2009</a:t>
             </a:fld>
@@ -5624,7 +5624,7 @@
           <a:bodyPr lIns="0" tIns="0" rIns="0" bIns="0" anchorCtr="0"/>
           <a:lstStyle/>
           <a:p>
-            <a:fld id="{23A0E488-8E4C-4DB4-B6C1-8EB4A0062952}" type="datetimeFigureOut">
+            <a:fld id="{7D5F39F5-4970-4E35-AED5-B2422B918EBC}" type="datetimeFigureOut">
               <a:rPr lang="en-US" smtClean="0"/>
               <a:t>11/7/2009</a:t>
             </a:fld>
@@ -5865,7 +5865,7 @@
           <a:bodyPr lIns="91446" tIns="45723" rIns="91446" bIns="45723" anchor="ctr" anchorCtr="0"/>
           <a:lstStyle/>
           <a:p>
-            <a:fld id="{83A32B65-8F9F-41D2-B956-7D56ED39315C}" type="datetimeFigureOut">
+            <a:fld id="{C322A7A8-CE5C-4AA8-9527-61D3102DCFBB}" type="datetimeFigureOut">
               <a:rPr lang="en-US" smtClean="0"/>
               <a:t>11/7/2009</a:t>
             </a:fld>
@@ -6148,7 +6148,7 @@
           <a:bodyPr lIns="0" tIns="0" rIns="0" bIns="0" anchorCtr="0"/>
           <a:lstStyle/>
           <a:p>
-            <a:fld id="{9FA4FED4-A108-4919-AAC5-D27BA2845DB0}" type="datetimeFigureOut">
+            <a:fld id="{2605C728-C5D3-482A-B092-48960685126E}" type="datetimeFigureOut">
               <a:rPr lang="en-US" smtClean="0"/>
               <a:t>11/7/2009</a:t>
             </a:fld>
@@ -6391,7 +6391,7 @@
           <a:bodyPr lIns="0" tIns="0" rIns="0" bIns="0" anchorCtr="0"/>
           <a:lstStyle/>
           <a:p>
-            <a:fld id="{8F3F8DBE-0595-429F-8BC7-4178403BBE93}" type="datetimeFigureOut">
+            <a:fld id="{8B75E2A3-7FAD-47A9-981F-E6F09D04F338}" type="datetimeFigureOut">
               <a:rPr lang="en-US" smtClean="0"/>
               <a:t>11/7/2009</a:t>
             </a:fld>
@@ -6566,7 +6566,7 @@
           <a:bodyPr lIns="0" tIns="0" rIns="0" bIns="0" anchorCtr="0"/>
           <a:lstStyle/>
           <a:p>
-            <a:fld id="{CE18B52B-C34B-40FC-838B-1C9561D79CB3}" type="datetimeFigureOut">
+            <a:fld id="{44903253-3838-4CC8-9CE4-E23A99DE7358}" type="datetimeFigureOut">
               <a:rPr lang="en-US" smtClean="0"/>
               <a:t>11/7/2009</a:t>
             </a:fld>
@@ -6741,7 +6741,7 @@
           <a:bodyPr lIns="0" tIns="0" rIns="0" bIns="0" anchorCtr="0"/>
           <a:lstStyle/>
           <a:p>
-            <a:fld id="{EAB5A2B6-100E-47FB-B093-8AB0E433639C}" type="datetimeFigureOut">
+            <a:fld id="{FF990493-DC5F-4695-9694-04BF9B416906}" type="datetimeFigureOut">
               <a:rPr lang="en-US" smtClean="0"/>
               <a:t>11/7/2009</a:t>
             </a:fld>
@@ -7023,7 +7023,7 @@
           <a:bodyPr lIns="91446" tIns="45723" rIns="91446" bIns="45723" anchor="ctr" anchorCtr="0"/>
           <a:lstStyle/>
           <a:p>
-            <a:fld id="{52A3A8CE-AD0E-4FE9-860A-315AE10316F9}" type="datetimeFigureOut">
+            <a:fld id="{135F3AD7-F0B8-4C42-8479-9149A9353E55}" type="datetimeFigureOut">
               <a:rPr lang="en-US" smtClean="0"/>
               <a:t>11/7/2009</a:t>
             </a:fld>
@@ -7440,7 +7440,7 @@
           <a:bodyPr lIns="91446" tIns="45723" rIns="91446" bIns="45723" anchor="ctr" anchorCtr="0"/>
           <a:lstStyle/>
           <a:p>
-            <a:fld id="{CA8D4E56-0AAE-4170-A443-D45410E43A6F}" type="datetimeFigureOut">
+            <a:fld id="{0818A7C3-5EC3-4107-8E49-99FD42015576}" type="datetimeFigureOut">
               <a:rPr lang="en-US" smtClean="0"/>
               <a:t>11/7/2009</a:t>
             </a:fld>
@@ -7581,7 +7581,7 @@
           <a:bodyPr lIns="91446" tIns="45723" rIns="91446" bIns="45723" anchor="ctr" anchorCtr="0"/>
           <a:lstStyle/>
           <a:p>
-            <a:fld id="{DEAAB9E3-3FE3-4EF0-B693-198B39342392}" type="datetimeFigureOut">
+            <a:fld id="{E45857B8-471B-45D1-BCD5-196F756E552C}" type="datetimeFigureOut">
               <a:rPr lang="en-US" smtClean="0"/>
               <a:t>11/7/2009</a:t>
             </a:fld>
@@ -7699,7 +7699,7 @@
           <a:bodyPr lIns="91446" tIns="45723" rIns="91446" bIns="45723" anchor="ctr" anchorCtr="0"/>
           <a:lstStyle/>
           <a:p>
-            <a:fld id="{23A0E488-8E4C-4DB4-B6C1-8EB4A0062952}" type="datetimeFigureOut">
+            <a:fld id="{7D5F39F5-4970-4E35-AED5-B2422B918EBC}" type="datetimeFigureOut">
               <a:rPr lang="en-US" smtClean="0"/>
               <a:t>11/7/2009</a:t>
             </a:fld>
@@ -7982,7 +7982,7 @@
           <a:bodyPr lIns="91446" tIns="45723" rIns="91446" bIns="45723" anchor="ctr" anchorCtr="0"/>
           <a:lstStyle/>
           <a:p>
-            <a:fld id="{9FA4FED4-A108-4919-AAC5-D27BA2845DB0}" type="datetimeFigureOut">
+            <a:fld id="{2605C728-C5D3-482A-B092-48960685126E}" type="datetimeFigureOut">
               <a:rPr lang="en-US" smtClean="0"/>
               <a:t>11/7/2009</a:t>
             </a:fld>
@@ -8242,7 +8242,7 @@
           <a:bodyPr lIns="91446" tIns="45723" rIns="91446" bIns="45723" anchor="ctr" anchorCtr="0"/>
           <a:lstStyle/>
           <a:p>
-            <a:fld id="{8F3F8DBE-0595-429F-8BC7-4178403BBE93}" type="datetimeFigureOut">
+            <a:fld id="{8B75E2A3-7FAD-47A9-981F-E6F09D04F338}" type="datetimeFigureOut">
               <a:rPr lang="en-US" smtClean="0"/>
               <a:t>11/7/2009</a:t>
             </a:fld>

--- a/Examples/GroupDocs.Assembly.Examples.Java/Data/Output/Presentation Reports/OtpToPptx.pptx
+++ b/Examples/GroupDocs.Assembly.Examples.Java/Data/Output/Presentation Reports/OtpToPptx.pptx
@@ -473,8 +473,8 @@
             </a:lvl1pPr>
           </a:lstStyle>
           <a:p>
-            <a:fld id="{E975F71A-9D09-405B-BEA6-3FB174C8DA43}" type="datetimeFigureOut">
-              <a:t>13.10.2026</a:t>
+            <a:fld id="{A8F2F05F-0447-4FF6-9296-BE8656E7C946}" type="datetimeFigureOut">
+              <a:t>15.10.2026</a:t>
             </a:fld>
           </a:p>
         </p:txBody>
@@ -623,7 +623,7 @@
             </a:lvl1pPr>
           </a:lstStyle>
           <a:p>
-            <a:fld id="{17B82CC4-B128-4479-B9FB-D88D45DE4F61}" type="slidenum">
+            <a:fld id="{AC19FCCC-F58B-4BC1-98D2-FB1D0B672C84}" type="slidenum">
               <a:rPr smtClean="0"/>
               <a:t>‹#›</a:t>
             </a:fld>
@@ -1050,7 +1050,7 @@
           <a:bodyPr lIns="91446" tIns="45723" rIns="91446" bIns="45723" anchor="ctr" anchorCtr="0"/>
           <a:lstStyle/>
           <a:p>
-            <a:fld id="{32ED64B5-8A78-4DDD-9625-879C8E037CF4}" type="datetimeFigureOut">
+            <a:fld id="{E61F34A5-3F9B-49DD-9442-6CF93D8D66FF}" type="datetimeFigureOut">
               <a:rPr lang="en-US" smtClean="0"/>
               <a:t>11/7/2009</a:t>
             </a:fld>
@@ -1242,7 +1242,7 @@
           <a:bodyPr lIns="91446" tIns="45723" rIns="91446" bIns="45723" anchor="ctr" anchorCtr="0"/>
           <a:lstStyle/>
           <a:p>
-            <a:fld id="{44903253-3838-4CC8-9CE4-E23A99DE7358}" type="datetimeFigureOut">
+            <a:fld id="{0A37BE20-6E04-4C4F-852A-B439A044F912}" type="datetimeFigureOut">
               <a:rPr lang="en-US" smtClean="0"/>
               <a:t>11/7/2009</a:t>
             </a:fld>
@@ -1434,7 +1434,7 @@
           <a:bodyPr lIns="91446" tIns="45723" rIns="91446" bIns="45723" anchor="ctr" anchorCtr="0"/>
           <a:lstStyle/>
           <a:p>
-            <a:fld id="{FF990493-DC5F-4695-9694-04BF9B416906}" type="datetimeFigureOut">
+            <a:fld id="{61A47F38-3D64-4EDD-B1BD-750ADD49C3EA}" type="datetimeFigureOut">
               <a:rPr lang="en-US" smtClean="0"/>
               <a:t>11/7/2009</a:t>
             </a:fld>
@@ -1689,7 +1689,7 @@
           <a:bodyPr lIns="0" tIns="0" rIns="0" bIns="0" anchorCtr="0"/>
           <a:lstStyle/>
           <a:p>
-            <a:fld id="{32ED64B5-8A78-4DDD-9625-879C8E037CF4}" type="datetimeFigureOut">
+            <a:fld id="{E61F34A5-3F9B-49DD-9442-6CF93D8D66FF}" type="datetimeFigureOut">
               <a:rPr lang="en-US" smtClean="0"/>
               <a:t>11/7/2009</a:t>
             </a:fld>
@@ -1864,7 +1864,7 @@
           <a:bodyPr lIns="0" tIns="0" rIns="0" bIns="0" anchorCtr="0"/>
           <a:lstStyle/>
           <a:p>
-            <a:fld id="{CD351D3F-FA01-469F-8EA6-4F1F181B14D3}" type="datetimeFigureOut">
+            <a:fld id="{61D7042E-319E-4E10-8256-8E03DE89A862}" type="datetimeFigureOut">
               <a:rPr lang="en-US" smtClean="0"/>
               <a:t>11/7/2009</a:t>
             </a:fld>
@@ -2105,7 +2105,7 @@
           <a:bodyPr lIns="0" tIns="0" rIns="0" bIns="0" anchorCtr="0"/>
           <a:lstStyle/>
           <a:p>
-            <a:fld id="{C322A7A8-CE5C-4AA8-9527-61D3102DCFBB}" type="datetimeFigureOut">
+            <a:fld id="{22D4187A-874B-4970-91D6-4562EB37A164}" type="datetimeFigureOut">
               <a:rPr lang="en-US" smtClean="0"/>
               <a:t>11/7/2009</a:t>
             </a:fld>
@@ -2387,7 +2387,7 @@
           <a:bodyPr lIns="0" tIns="0" rIns="0" bIns="0" anchorCtr="0"/>
           <a:lstStyle/>
           <a:p>
-            <a:fld id="{135F3AD7-F0B8-4C42-8479-9149A9353E55}" type="datetimeFigureOut">
+            <a:fld id="{8659E6DD-75AC-4C52-88C1-615EE417221A}" type="datetimeFigureOut">
               <a:rPr lang="en-US" smtClean="0"/>
               <a:t>11/7/2009</a:t>
             </a:fld>
@@ -2787,7 +2787,7 @@
           <a:bodyPr lIns="0" tIns="0" rIns="0" bIns="0" anchorCtr="0"/>
           <a:lstStyle/>
           <a:p>
-            <a:fld id="{0818A7C3-5EC3-4107-8E49-99FD42015576}" type="datetimeFigureOut">
+            <a:fld id="{346329BA-692F-448D-A0B1-8130226A84C3}" type="datetimeFigureOut">
               <a:rPr lang="en-US" smtClean="0"/>
               <a:t>11/7/2009</a:t>
             </a:fld>
@@ -2911,7 +2911,7 @@
           <a:bodyPr lIns="0" tIns="0" rIns="0" bIns="0" anchorCtr="0"/>
           <a:lstStyle/>
           <a:p>
-            <a:fld id="{E45857B8-471B-45D1-BCD5-196F756E552C}" type="datetimeFigureOut">
+            <a:fld id="{A3E9AACF-124E-44B4-A205-2E3AD141E249}" type="datetimeFigureOut">
               <a:rPr lang="en-US" smtClean="0"/>
               <a:t>11/7/2009</a:t>
             </a:fld>
@@ -3012,7 +3012,7 @@
           <a:bodyPr lIns="0" tIns="0" rIns="0" bIns="0" anchorCtr="0"/>
           <a:lstStyle/>
           <a:p>
-            <a:fld id="{7D5F39F5-4970-4E35-AED5-B2422B918EBC}" type="datetimeFigureOut">
+            <a:fld id="{A3C9C8C0-2542-4963-B6A7-733BE04668D8}" type="datetimeFigureOut">
               <a:rPr lang="en-US" smtClean="0"/>
               <a:t>11/7/2009</a:t>
             </a:fld>
@@ -3278,7 +3278,7 @@
           <a:bodyPr lIns="0" tIns="0" rIns="0" bIns="0" anchorCtr="0"/>
           <a:lstStyle/>
           <a:p>
-            <a:fld id="{2605C728-C5D3-482A-B092-48960685126E}" type="datetimeFigureOut">
+            <a:fld id="{21244566-D2DA-454C-9A1C-CD2593830966}" type="datetimeFigureOut">
               <a:rPr lang="en-US" smtClean="0"/>
               <a:t>11/7/2009</a:t>
             </a:fld>
@@ -3453,7 +3453,7 @@
           <a:bodyPr lIns="91446" tIns="45723" rIns="91446" bIns="45723" anchor="ctr" anchorCtr="0"/>
           <a:lstStyle/>
           <a:p>
-            <a:fld id="{CD351D3F-FA01-469F-8EA6-4F1F181B14D3}" type="datetimeFigureOut">
+            <a:fld id="{61D7042E-319E-4E10-8256-8E03DE89A862}" type="datetimeFigureOut">
               <a:rPr lang="en-US" smtClean="0"/>
               <a:t>11/7/2009</a:t>
             </a:fld>
@@ -3713,7 +3713,7 @@
           <a:bodyPr lIns="0" tIns="0" rIns="0" bIns="0" anchorCtr="0"/>
           <a:lstStyle/>
           <a:p>
-            <a:fld id="{8B75E2A3-7FAD-47A9-981F-E6F09D04F338}" type="datetimeFigureOut">
+            <a:fld id="{864A8CBE-B410-4754-9D14-44BA651C5F1B}" type="datetimeFigureOut">
               <a:rPr lang="en-US" smtClean="0"/>
               <a:t>11/7/2009</a:t>
             </a:fld>
@@ -3888,7 +3888,7 @@
           <a:bodyPr lIns="0" tIns="0" rIns="0" bIns="0" anchorCtr="0"/>
           <a:lstStyle/>
           <a:p>
-            <a:fld id="{44903253-3838-4CC8-9CE4-E23A99DE7358}" type="datetimeFigureOut">
+            <a:fld id="{0A37BE20-6E04-4C4F-852A-B439A044F912}" type="datetimeFigureOut">
               <a:rPr lang="en-US" smtClean="0"/>
               <a:t>11/7/2009</a:t>
             </a:fld>
@@ -4063,7 +4063,7 @@
           <a:bodyPr lIns="0" tIns="0" rIns="0" bIns="0" anchorCtr="0"/>
           <a:lstStyle/>
           <a:p>
-            <a:fld id="{FF990493-DC5F-4695-9694-04BF9B416906}" type="datetimeFigureOut">
+            <a:fld id="{61A47F38-3D64-4EDD-B1BD-750ADD49C3EA}" type="datetimeFigureOut">
               <a:rPr lang="en-US" smtClean="0"/>
               <a:t>11/7/2009</a:t>
             </a:fld>
@@ -4301,7 +4301,7 @@
           <a:bodyPr lIns="0" tIns="0" rIns="0" bIns="0" anchorCtr="0"/>
           <a:lstStyle/>
           <a:p>
-            <a:fld id="{32ED64B5-8A78-4DDD-9625-879C8E037CF4}" type="datetimeFigureOut">
+            <a:fld id="{E61F34A5-3F9B-49DD-9442-6CF93D8D66FF}" type="datetimeFigureOut">
               <a:rPr lang="en-US" smtClean="0"/>
               <a:t>11/7/2009</a:t>
             </a:fld>
@@ -4476,7 +4476,7 @@
           <a:bodyPr lIns="0" tIns="0" rIns="0" bIns="0" anchorCtr="0"/>
           <a:lstStyle/>
           <a:p>
-            <a:fld id="{CD351D3F-FA01-469F-8EA6-4F1F181B14D3}" type="datetimeFigureOut">
+            <a:fld id="{61D7042E-319E-4E10-8256-8E03DE89A862}" type="datetimeFigureOut">
               <a:rPr lang="en-US" smtClean="0"/>
               <a:t>11/7/2009</a:t>
             </a:fld>
@@ -4717,7 +4717,7 @@
           <a:bodyPr lIns="0" tIns="0" rIns="0" bIns="0" anchorCtr="0"/>
           <a:lstStyle/>
           <a:p>
-            <a:fld id="{C322A7A8-CE5C-4AA8-9527-61D3102DCFBB}" type="datetimeFigureOut">
+            <a:fld id="{22D4187A-874B-4970-91D6-4562EB37A164}" type="datetimeFigureOut">
               <a:rPr lang="en-US" smtClean="0"/>
               <a:t>11/7/2009</a:t>
             </a:fld>
@@ -4999,7 +4999,7 @@
           <a:bodyPr lIns="0" tIns="0" rIns="0" bIns="0" anchorCtr="0"/>
           <a:lstStyle/>
           <a:p>
-            <a:fld id="{135F3AD7-F0B8-4C42-8479-9149A9353E55}" type="datetimeFigureOut">
+            <a:fld id="{8659E6DD-75AC-4C52-88C1-615EE417221A}" type="datetimeFigureOut">
               <a:rPr lang="en-US" smtClean="0"/>
               <a:t>11/7/2009</a:t>
             </a:fld>
@@ -5399,7 +5399,7 @@
           <a:bodyPr lIns="0" tIns="0" rIns="0" bIns="0" anchorCtr="0"/>
           <a:lstStyle/>
           <a:p>
-            <a:fld id="{0818A7C3-5EC3-4107-8E49-99FD42015576}" type="datetimeFigureOut">
+            <a:fld id="{346329BA-692F-448D-A0B1-8130226A84C3}" type="datetimeFigureOut">
               <a:rPr lang="en-US" smtClean="0"/>
               <a:t>11/7/2009</a:t>
             </a:fld>
@@ -5523,7 +5523,7 @@
           <a:bodyPr lIns="0" tIns="0" rIns="0" bIns="0" anchorCtr="0"/>
           <a:lstStyle/>
           <a:p>
-            <a:fld id="{E45857B8-471B-45D1-BCD5-196F756E552C}" type="datetimeFigureOut">
+            <a:fld id="{A3E9AACF-124E-44B4-A205-2E3AD141E249}" type="datetimeFigureOut">
               <a:rPr lang="en-US" smtClean="0"/>
               <a:t>11/7/2009</a:t>
             </a:fld>
@@ -5624,7 +5624,7 @@
           <a:bodyPr lIns="0" tIns="0" rIns="0" bIns="0" anchorCtr="0"/>
           <a:lstStyle/>
           <a:p>
-            <a:fld id="{7D5F39F5-4970-4E35-AED5-B2422B918EBC}" type="datetimeFigureOut">
+            <a:fld id="{A3C9C8C0-2542-4963-B6A7-733BE04668D8}" type="datetimeFigureOut">
               <a:rPr lang="en-US" smtClean="0"/>
               <a:t>11/7/2009</a:t>
             </a:fld>
@@ -5865,7 +5865,7 @@
           <a:bodyPr lIns="91446" tIns="45723" rIns="91446" bIns="45723" anchor="ctr" anchorCtr="0"/>
           <a:lstStyle/>
           <a:p>
-            <a:fld id="{C322A7A8-CE5C-4AA8-9527-61D3102DCFBB}" type="datetimeFigureOut">
+            <a:fld id="{22D4187A-874B-4970-91D6-4562EB37A164}" type="datetimeFigureOut">
               <a:rPr lang="en-US" smtClean="0"/>
               <a:t>11/7/2009</a:t>
             </a:fld>
@@ -6148,7 +6148,7 @@
           <a:bodyPr lIns="0" tIns="0" rIns="0" bIns="0" anchorCtr="0"/>
           <a:lstStyle/>
           <a:p>
-            <a:fld id="{2605C728-C5D3-482A-B092-48960685126E}" type="datetimeFigureOut">
+            <a:fld id="{21244566-D2DA-454C-9A1C-CD2593830966}" type="datetimeFigureOut">
               <a:rPr lang="en-US" smtClean="0"/>
               <a:t>11/7/2009</a:t>
             </a:fld>
@@ -6391,7 +6391,7 @@
           <a:bodyPr lIns="0" tIns="0" rIns="0" bIns="0" anchorCtr="0"/>
           <a:lstStyle/>
           <a:p>
-            <a:fld id="{8B75E2A3-7FAD-47A9-981F-E6F09D04F338}" type="datetimeFigureOut">
+            <a:fld id="{864A8CBE-B410-4754-9D14-44BA651C5F1B}" type="datetimeFigureOut">
               <a:rPr lang="en-US" smtClean="0"/>
               <a:t>11/7/2009</a:t>
             </a:fld>
@@ -6566,7 +6566,7 @@
           <a:bodyPr lIns="0" tIns="0" rIns="0" bIns="0" anchorCtr="0"/>
           <a:lstStyle/>
           <a:p>
-            <a:fld id="{44903253-3838-4CC8-9CE4-E23A99DE7358}" type="datetimeFigureOut">
+            <a:fld id="{0A37BE20-6E04-4C4F-852A-B439A044F912}" type="datetimeFigureOut">
               <a:rPr lang="en-US" smtClean="0"/>
               <a:t>11/7/2009</a:t>
             </a:fld>
@@ -6741,7 +6741,7 @@
           <a:bodyPr lIns="0" tIns="0" rIns="0" bIns="0" anchorCtr="0"/>
           <a:lstStyle/>
           <a:p>
-            <a:fld id="{FF990493-DC5F-4695-9694-04BF9B416906}" type="datetimeFigureOut">
+            <a:fld id="{61A47F38-3D64-4EDD-B1BD-750ADD49C3EA}" type="datetimeFigureOut">
               <a:rPr lang="en-US" smtClean="0"/>
               <a:t>11/7/2009</a:t>
             </a:fld>
@@ -7023,7 +7023,7 @@
           <a:bodyPr lIns="91446" tIns="45723" rIns="91446" bIns="45723" anchor="ctr" anchorCtr="0"/>
           <a:lstStyle/>
           <a:p>
-            <a:fld id="{135F3AD7-F0B8-4C42-8479-9149A9353E55}" type="datetimeFigureOut">
+            <a:fld id="{8659E6DD-75AC-4C52-88C1-615EE417221A}" type="datetimeFigureOut">
               <a:rPr lang="en-US" smtClean="0"/>
               <a:t>11/7/2009</a:t>
             </a:fld>
@@ -7440,7 +7440,7 @@
           <a:bodyPr lIns="91446" tIns="45723" rIns="91446" bIns="45723" anchor="ctr" anchorCtr="0"/>
           <a:lstStyle/>
           <a:p>
-            <a:fld id="{0818A7C3-5EC3-4107-8E49-99FD42015576}" type="datetimeFigureOut">
+            <a:fld id="{346329BA-692F-448D-A0B1-8130226A84C3}" type="datetimeFigureOut">
               <a:rPr lang="en-US" smtClean="0"/>
               <a:t>11/7/2009</a:t>
             </a:fld>
@@ -7581,7 +7581,7 @@
           <a:bodyPr lIns="91446" tIns="45723" rIns="91446" bIns="45723" anchor="ctr" anchorCtr="0"/>
           <a:lstStyle/>
           <a:p>
-            <a:fld id="{E45857B8-471B-45D1-BCD5-196F756E552C}" type="datetimeFigureOut">
+            <a:fld id="{A3E9AACF-124E-44B4-A205-2E3AD141E249}" type="datetimeFigureOut">
               <a:rPr lang="en-US" smtClean="0"/>
               <a:t>11/7/2009</a:t>
             </a:fld>
@@ -7699,7 +7699,7 @@
           <a:bodyPr lIns="91446" tIns="45723" rIns="91446" bIns="45723" anchor="ctr" anchorCtr="0"/>
           <a:lstStyle/>
           <a:p>
-            <a:fld id="{7D5F39F5-4970-4E35-AED5-B2422B918EBC}" type="datetimeFigureOut">
+            <a:fld id="{A3C9C8C0-2542-4963-B6A7-733BE04668D8}" type="datetimeFigureOut">
               <a:rPr lang="en-US" smtClean="0"/>
               <a:t>11/7/2009</a:t>
             </a:fld>
@@ -7982,7 +7982,7 @@
           <a:bodyPr lIns="91446" tIns="45723" rIns="91446" bIns="45723" anchor="ctr" anchorCtr="0"/>
           <a:lstStyle/>
           <a:p>
-            <a:fld id="{2605C728-C5D3-482A-B092-48960685126E}" type="datetimeFigureOut">
+            <a:fld id="{21244566-D2DA-454C-9A1C-CD2593830966}" type="datetimeFigureOut">
               <a:rPr lang="en-US" smtClean="0"/>
               <a:t>11/7/2009</a:t>
             </a:fld>
@@ -8242,7 +8242,7 @@
           <a:bodyPr lIns="91446" tIns="45723" rIns="91446" bIns="45723" anchor="ctr" anchorCtr="0"/>
           <a:lstStyle/>
           <a:p>
-            <a:fld id="{8B75E2A3-7FAD-47A9-981F-E6F09D04F338}" type="datetimeFigureOut">
+            <a:fld id="{864A8CBE-B410-4754-9D14-44BA651C5F1B}" type="datetimeFigureOut">
               <a:rPr lang="en-US" smtClean="0"/>
               <a:t>11/7/2009</a:t>
             </a:fld>
